--- a/docs/AI217_YIELDMAP_deck.pptx
+++ b/docs/AI217_YIELDMAP_deck.pptx
@@ -4299,7 +4299,7 @@
       <p:grpSpPr/>
       <p:sp>
         <p:nvSpPr>
-          <p:cNvPr id="2" name="Rounded Rectangle 1"/>
+          <p:cNvPr id="2" name="Rectangle 1"/>
           <p:cNvSpPr/>
           <p:nvPr/>
         </p:nvSpPr>
@@ -4308,10 +4308,8 @@
             <a:off x="0" y="0"/>
             <a:ext cx="12191695" cy="4114800"/>
           </a:xfrm>
-          <a:prstGeom prst="roundRect">
-            <a:avLst>
-              <a:gd name="adj" fmla="val 6000"/>
-            </a:avLst>
+          <a:prstGeom prst="rect">
+            <a:avLst/>
           </a:prstGeom>
           <a:solidFill>
             <a:srgbClr val="1F7A70"/>
@@ -4784,8 +4782,8 @@
         </p:nvSpPr>
         <p:spPr>
           <a:xfrm>
-            <a:off x="685800" y="2377440"/>
-            <a:ext cx="3108960" cy="777240"/>
+            <a:off x="868680" y="2377440"/>
+            <a:ext cx="2743200" cy="777240"/>
           </a:xfrm>
           <a:prstGeom prst="rect">
             <a:avLst/>
@@ -4819,8 +4817,8 @@
         </p:nvSpPr>
         <p:spPr>
           <a:xfrm>
-            <a:off x="685800" y="3127248"/>
-            <a:ext cx="3108960" cy="731520"/>
+            <a:off x="868680" y="3127248"/>
+            <a:ext cx="2743200" cy="731520"/>
           </a:xfrm>
           <a:prstGeom prst="rect">
             <a:avLst/>
@@ -4841,7 +4839,7 @@
                 </a:solidFill>
                 <a:latin typeface="Calibri"/>
               </a:rPr>
-              <a:t>per month · verified against published rates</a:t>
+              <a:t>per month · against published rates</a:t>
             </a:r>
           </a:p>
         </p:txBody>
@@ -5948,7 +5946,7 @@
       <p:grpSpPr/>
       <p:sp>
         <p:nvSpPr>
-          <p:cNvPr id="2" name="Rounded Rectangle 1"/>
+          <p:cNvPr id="2" name="Rectangle 1"/>
           <p:cNvSpPr/>
           <p:nvPr/>
         </p:nvSpPr>
@@ -5957,10 +5955,8 @@
             <a:off x="0" y="0"/>
             <a:ext cx="12191695" cy="2880360"/>
           </a:xfrm>
-          <a:prstGeom prst="roundRect">
-            <a:avLst>
-              <a:gd name="adj" fmla="val 6000"/>
-            </a:avLst>
+          <a:prstGeom prst="rect">
+            <a:avLst/>
           </a:prstGeom>
           <a:solidFill>
             <a:srgbClr val="1F7A70"/>
@@ -7747,7 +7743,7 @@
         <p:spPr>
           <a:xfrm>
             <a:off x="685800" y="2286000"/>
-            <a:ext cx="2084831" cy="1554480"/>
+            <a:ext cx="1956816" cy="1554480"/>
           </a:xfrm>
           <a:prstGeom prst="roundRect">
             <a:avLst>
@@ -7792,8 +7788,8 @@
         </p:nvSpPr>
         <p:spPr>
           <a:xfrm>
-            <a:off x="832104" y="2450592"/>
-            <a:ext cx="1792223" cy="365760"/>
+            <a:off x="813816" y="2450592"/>
+            <a:ext cx="1700784" cy="365760"/>
           </a:xfrm>
           <a:prstGeom prst="rect">
             <a:avLst/>
@@ -7827,8 +7823,8 @@
         </p:nvSpPr>
         <p:spPr>
           <a:xfrm>
-            <a:off x="832104" y="2862072"/>
-            <a:ext cx="1792223" cy="868680"/>
+            <a:off x="813816" y="2862072"/>
+            <a:ext cx="1700784" cy="868680"/>
           </a:xfrm>
           <a:prstGeom prst="rect">
             <a:avLst/>
@@ -7856,49 +7852,14 @@
       </p:sp>
       <p:sp>
         <p:nvSpPr>
-          <p:cNvPr id="7" name="TextBox 6"/>
-          <p:cNvSpPr txBox="1"/>
-          <p:nvPr/>
-        </p:nvSpPr>
-        <p:spPr>
-          <a:xfrm>
-            <a:off x="2770631" y="2761488"/>
-            <a:ext cx="384048" cy="365760"/>
-          </a:xfrm>
-          <a:prstGeom prst="rect">
-            <a:avLst/>
-          </a:prstGeom>
-          <a:noFill/>
-        </p:spPr>
-        <p:txBody>
-          <a:bodyPr wrap="square" lIns="0" rIns="0" tIns="0" bIns="0" anchor="t">
-            <a:spAutoFit/>
-          </a:bodyPr>
-          <a:lstStyle/>
-          <a:p>
-            <a:pPr algn="ctr"/>
-            <a:r>
-              <a:rPr sz="1900" b="0" i="0">
-                <a:solidFill>
-                  <a:srgbClr val="1F7A70"/>
-                </a:solidFill>
-                <a:latin typeface="Calibri"/>
-              </a:rPr>
-              <a:t>→</a:t>
-            </a:r>
-          </a:p>
-        </p:txBody>
-      </p:sp>
-      <p:sp>
-        <p:nvSpPr>
-          <p:cNvPr id="8" name="Rounded Rectangle 7"/>
+          <p:cNvPr id="7" name="Rounded Rectangle 6"/>
           <p:cNvSpPr/>
           <p:nvPr/>
         </p:nvSpPr>
         <p:spPr>
           <a:xfrm>
             <a:off x="2898648" y="2286000"/>
-            <a:ext cx="2084831" cy="1554480"/>
+            <a:ext cx="1956816" cy="1554480"/>
           </a:xfrm>
           <a:prstGeom prst="roundRect">
             <a:avLst>
@@ -7937,14 +7898,49 @@
       </p:sp>
       <p:sp>
         <p:nvSpPr>
+          <p:cNvPr id="8" name="TextBox 7"/>
+          <p:cNvSpPr txBox="1"/>
+          <p:nvPr/>
+        </p:nvSpPr>
+        <p:spPr>
+          <a:xfrm>
+            <a:off x="3026664" y="2450592"/>
+            <a:ext cx="1700784" cy="365760"/>
+          </a:xfrm>
+          <a:prstGeom prst="rect">
+            <a:avLst/>
+          </a:prstGeom>
+          <a:noFill/>
+        </p:spPr>
+        <p:txBody>
+          <a:bodyPr wrap="square" lIns="0" rIns="0" tIns="0" bIns="0" anchor="t">
+            <a:spAutoFit/>
+          </a:bodyPr>
+          <a:lstStyle/>
+          <a:p>
+            <a:pPr algn="ctr"/>
+            <a:r>
+              <a:rPr sz="1500" b="1" i="0">
+                <a:solidFill>
+                  <a:srgbClr val="1F7A70"/>
+                </a:solidFill>
+                <a:latin typeface="Cambria"/>
+              </a:rPr>
+              <a:t>Warehouse</a:t>
+            </a:r>
+          </a:p>
+        </p:txBody>
+      </p:sp>
+      <p:sp>
+        <p:nvSpPr>
           <p:cNvPr id="9" name="TextBox 8"/>
           <p:cNvSpPr txBox="1"/>
           <p:nvPr/>
         </p:nvSpPr>
         <p:spPr>
           <a:xfrm>
-            <a:off x="3044952" y="2450592"/>
-            <a:ext cx="1792223" cy="365760"/>
+            <a:off x="3026664" y="2862072"/>
+            <a:ext cx="1700784" cy="868680"/>
           </a:xfrm>
           <a:prstGeom prst="rect">
             <a:avLst/>
@@ -7959,41 +7955,6 @@
           <a:p>
             <a:pPr algn="ctr"/>
             <a:r>
-              <a:rPr sz="1500" b="1" i="0">
-                <a:solidFill>
-                  <a:srgbClr val="1F7A70"/>
-                </a:solidFill>
-                <a:latin typeface="Cambria"/>
-              </a:rPr>
-              <a:t>Warehouse</a:t>
-            </a:r>
-          </a:p>
-        </p:txBody>
-      </p:sp>
-      <p:sp>
-        <p:nvSpPr>
-          <p:cNvPr id="10" name="TextBox 9"/>
-          <p:cNvSpPr txBox="1"/>
-          <p:nvPr/>
-        </p:nvSpPr>
-        <p:spPr>
-          <a:xfrm>
-            <a:off x="3044952" y="2862072"/>
-            <a:ext cx="1792223" cy="868680"/>
-          </a:xfrm>
-          <a:prstGeom prst="rect">
-            <a:avLst/>
-          </a:prstGeom>
-          <a:noFill/>
-        </p:spPr>
-        <p:txBody>
-          <a:bodyPr wrap="square" lIns="0" rIns="0" tIns="0" bIns="0" anchor="t">
-            <a:spAutoFit/>
-          </a:bodyPr>
-          <a:lstStyle/>
-          <a:p>
-            <a:pPr algn="ctr"/>
-            <a:r>
               <a:rPr sz="1050" b="0" i="0">
                 <a:solidFill>
                   <a:srgbClr val="5F6B68"/>
@@ -8007,49 +7968,14 @@
       </p:sp>
       <p:sp>
         <p:nvSpPr>
-          <p:cNvPr id="11" name="TextBox 10"/>
-          <p:cNvSpPr txBox="1"/>
-          <p:nvPr/>
-        </p:nvSpPr>
-        <p:spPr>
-          <a:xfrm>
-            <a:off x="4983479" y="2761488"/>
-            <a:ext cx="384048" cy="365760"/>
-          </a:xfrm>
-          <a:prstGeom prst="rect">
-            <a:avLst/>
-          </a:prstGeom>
-          <a:noFill/>
-        </p:spPr>
-        <p:txBody>
-          <a:bodyPr wrap="square" lIns="0" rIns="0" tIns="0" bIns="0" anchor="t">
-            <a:spAutoFit/>
-          </a:bodyPr>
-          <a:lstStyle/>
-          <a:p>
-            <a:pPr algn="ctr"/>
-            <a:r>
-              <a:rPr sz="1900" b="0" i="0">
-                <a:solidFill>
-                  <a:srgbClr val="1F7A70"/>
-                </a:solidFill>
-                <a:latin typeface="Calibri"/>
-              </a:rPr>
-              <a:t>→</a:t>
-            </a:r>
-          </a:p>
-        </p:txBody>
-      </p:sp>
-      <p:sp>
-        <p:nvSpPr>
-          <p:cNvPr id="12" name="Rounded Rectangle 11"/>
+          <p:cNvPr id="10" name="Rounded Rectangle 9"/>
           <p:cNvSpPr/>
           <p:nvPr/>
         </p:nvSpPr>
         <p:spPr>
           <a:xfrm>
             <a:off x="5111496" y="2286000"/>
-            <a:ext cx="2084831" cy="1554480"/>
+            <a:ext cx="1956816" cy="1554480"/>
           </a:xfrm>
           <a:prstGeom prst="roundRect">
             <a:avLst>
@@ -8088,14 +8014,14 @@
       </p:sp>
       <p:sp>
         <p:nvSpPr>
-          <p:cNvPr id="13" name="TextBox 12"/>
-          <p:cNvSpPr txBox="1"/>
-          <p:nvPr/>
-        </p:nvSpPr>
-        <p:spPr>
-          <a:xfrm>
-            <a:off x="5257800" y="2450592"/>
-            <a:ext cx="1792223" cy="365760"/>
+          <p:cNvPr id="11" name="TextBox 10"/>
+          <p:cNvSpPr txBox="1"/>
+          <p:nvPr/>
+        </p:nvSpPr>
+        <p:spPr>
+          <a:xfrm>
+            <a:off x="5239512" y="2450592"/>
+            <a:ext cx="1700784" cy="365760"/>
           </a:xfrm>
           <a:prstGeom prst="rect">
             <a:avLst/>
@@ -8123,14 +8049,14 @@
       </p:sp>
       <p:sp>
         <p:nvSpPr>
-          <p:cNvPr id="14" name="TextBox 13"/>
-          <p:cNvSpPr txBox="1"/>
-          <p:nvPr/>
-        </p:nvSpPr>
-        <p:spPr>
-          <a:xfrm>
-            <a:off x="5257800" y="2862072"/>
-            <a:ext cx="1792223" cy="868680"/>
+          <p:cNvPr id="12" name="TextBox 11"/>
+          <p:cNvSpPr txBox="1"/>
+          <p:nvPr/>
+        </p:nvSpPr>
+        <p:spPr>
+          <a:xfrm>
+            <a:off x="5239512" y="2862072"/>
+            <a:ext cx="1700784" cy="868680"/>
           </a:xfrm>
           <a:prstGeom prst="rect">
             <a:avLst/>
@@ -8158,49 +8084,14 @@
       </p:sp>
       <p:sp>
         <p:nvSpPr>
-          <p:cNvPr id="15" name="TextBox 14"/>
-          <p:cNvSpPr txBox="1"/>
-          <p:nvPr/>
-        </p:nvSpPr>
-        <p:spPr>
-          <a:xfrm>
-            <a:off x="7196327" y="2761488"/>
-            <a:ext cx="384048" cy="365760"/>
-          </a:xfrm>
-          <a:prstGeom prst="rect">
-            <a:avLst/>
-          </a:prstGeom>
-          <a:noFill/>
-        </p:spPr>
-        <p:txBody>
-          <a:bodyPr wrap="square" lIns="0" rIns="0" tIns="0" bIns="0" anchor="t">
-            <a:spAutoFit/>
-          </a:bodyPr>
-          <a:lstStyle/>
-          <a:p>
-            <a:pPr algn="ctr"/>
-            <a:r>
-              <a:rPr sz="1900" b="0" i="0">
-                <a:solidFill>
-                  <a:srgbClr val="1F7A70"/>
-                </a:solidFill>
-                <a:latin typeface="Calibri"/>
-              </a:rPr>
-              <a:t>→</a:t>
-            </a:r>
-          </a:p>
-        </p:txBody>
-      </p:sp>
-      <p:sp>
-        <p:nvSpPr>
-          <p:cNvPr id="16" name="Rounded Rectangle 15"/>
+          <p:cNvPr id="13" name="Rounded Rectangle 12"/>
           <p:cNvSpPr/>
           <p:nvPr/>
         </p:nvSpPr>
         <p:spPr>
           <a:xfrm>
             <a:off x="7324344" y="2286000"/>
-            <a:ext cx="2084831" cy="1554480"/>
+            <a:ext cx="1956816" cy="1554480"/>
           </a:xfrm>
           <a:prstGeom prst="roundRect">
             <a:avLst>
@@ -8239,14 +8130,14 @@
       </p:sp>
       <p:sp>
         <p:nvSpPr>
-          <p:cNvPr id="17" name="TextBox 16"/>
-          <p:cNvSpPr txBox="1"/>
-          <p:nvPr/>
-        </p:nvSpPr>
-        <p:spPr>
-          <a:xfrm>
-            <a:off x="7470648" y="2450592"/>
-            <a:ext cx="1792223" cy="365760"/>
+          <p:cNvPr id="14" name="TextBox 13"/>
+          <p:cNvSpPr txBox="1"/>
+          <p:nvPr/>
+        </p:nvSpPr>
+        <p:spPr>
+          <a:xfrm>
+            <a:off x="7452360" y="2450592"/>
+            <a:ext cx="1700784" cy="365760"/>
           </a:xfrm>
           <a:prstGeom prst="rect">
             <a:avLst/>
@@ -8274,14 +8165,14 @@
       </p:sp>
       <p:sp>
         <p:nvSpPr>
-          <p:cNvPr id="18" name="TextBox 17"/>
-          <p:cNvSpPr txBox="1"/>
-          <p:nvPr/>
-        </p:nvSpPr>
-        <p:spPr>
-          <a:xfrm>
-            <a:off x="7470648" y="2862072"/>
-            <a:ext cx="1792223" cy="868680"/>
+          <p:cNvPr id="15" name="TextBox 14"/>
+          <p:cNvSpPr txBox="1"/>
+          <p:nvPr/>
+        </p:nvSpPr>
+        <p:spPr>
+          <a:xfrm>
+            <a:off x="7452360" y="2862072"/>
+            <a:ext cx="1700784" cy="868680"/>
           </a:xfrm>
           <a:prstGeom prst="rect">
             <a:avLst/>
@@ -8309,49 +8200,14 @@
       </p:sp>
       <p:sp>
         <p:nvSpPr>
-          <p:cNvPr id="19" name="TextBox 18"/>
-          <p:cNvSpPr txBox="1"/>
-          <p:nvPr/>
-        </p:nvSpPr>
-        <p:spPr>
-          <a:xfrm>
-            <a:off x="9409175" y="2761488"/>
-            <a:ext cx="384048" cy="365760"/>
-          </a:xfrm>
-          <a:prstGeom prst="rect">
-            <a:avLst/>
-          </a:prstGeom>
-          <a:noFill/>
-        </p:spPr>
-        <p:txBody>
-          <a:bodyPr wrap="square" lIns="0" rIns="0" tIns="0" bIns="0" anchor="t">
-            <a:spAutoFit/>
-          </a:bodyPr>
-          <a:lstStyle/>
-          <a:p>
-            <a:pPr algn="ctr"/>
-            <a:r>
-              <a:rPr sz="1900" b="0" i="0">
-                <a:solidFill>
-                  <a:srgbClr val="1F7A70"/>
-                </a:solidFill>
-                <a:latin typeface="Calibri"/>
-              </a:rPr>
-              <a:t>→</a:t>
-            </a:r>
-          </a:p>
-        </p:txBody>
-      </p:sp>
-      <p:sp>
-        <p:nvSpPr>
-          <p:cNvPr id="20" name="Rounded Rectangle 19"/>
+          <p:cNvPr id="16" name="Rounded Rectangle 15"/>
           <p:cNvSpPr/>
           <p:nvPr/>
         </p:nvSpPr>
         <p:spPr>
           <a:xfrm>
             <a:off x="9537192" y="2286000"/>
-            <a:ext cx="2084831" cy="1554480"/>
+            <a:ext cx="1956816" cy="1554480"/>
           </a:xfrm>
           <a:prstGeom prst="roundRect">
             <a:avLst>
@@ -8390,14 +8246,14 @@
       </p:sp>
       <p:sp>
         <p:nvSpPr>
-          <p:cNvPr id="21" name="TextBox 20"/>
-          <p:cNvSpPr txBox="1"/>
-          <p:nvPr/>
-        </p:nvSpPr>
-        <p:spPr>
-          <a:xfrm>
-            <a:off x="9683496" y="2450592"/>
-            <a:ext cx="1792223" cy="365760"/>
+          <p:cNvPr id="17" name="TextBox 16"/>
+          <p:cNvSpPr txBox="1"/>
+          <p:nvPr/>
+        </p:nvSpPr>
+        <p:spPr>
+          <a:xfrm>
+            <a:off x="9665208" y="2450592"/>
+            <a:ext cx="1700784" cy="365760"/>
           </a:xfrm>
           <a:prstGeom prst="rect">
             <a:avLst/>
@@ -8425,14 +8281,14 @@
       </p:sp>
       <p:sp>
         <p:nvSpPr>
-          <p:cNvPr id="22" name="TextBox 21"/>
-          <p:cNvSpPr txBox="1"/>
-          <p:nvPr/>
-        </p:nvSpPr>
-        <p:spPr>
-          <a:xfrm>
-            <a:off x="9683496" y="2862072"/>
-            <a:ext cx="1792223" cy="868680"/>
+          <p:cNvPr id="18" name="TextBox 17"/>
+          <p:cNvSpPr txBox="1"/>
+          <p:nvPr/>
+        </p:nvSpPr>
+        <p:spPr>
+          <a:xfrm>
+            <a:off x="9665208" y="2862072"/>
+            <a:ext cx="1700784" cy="868680"/>
           </a:xfrm>
           <a:prstGeom prst="rect">
             <a:avLst/>
@@ -8455,6 +8311,182 @@
               </a:rPr>
               <a:t>Next.js on Vercel · 20 routes, 3 languages</a:t>
             </a:r>
+          </a:p>
+        </p:txBody>
+      </p:sp>
+      <p:sp>
+        <p:nvSpPr>
+          <p:cNvPr id="19" name="Right Arrow 18"/>
+          <p:cNvSpPr/>
+          <p:nvPr/>
+        </p:nvSpPr>
+        <p:spPr>
+          <a:xfrm>
+            <a:off x="2670048" y="2980944"/>
+            <a:ext cx="201168" cy="146304"/>
+          </a:xfrm>
+          <a:prstGeom prst="rightArrow">
+            <a:avLst/>
+          </a:prstGeom>
+          <a:solidFill>
+            <a:srgbClr val="1F7A70"/>
+          </a:solidFill>
+          <a:ln>
+            <a:noFill/>
+          </a:ln>
+          <a:effectLst/>
+        </p:spPr>
+        <p:style>
+          <a:lnRef idx="1">
+            <a:schemeClr val="accent1"/>
+          </a:lnRef>
+          <a:fillRef idx="3">
+            <a:schemeClr val="accent1"/>
+          </a:fillRef>
+          <a:effectRef idx="2">
+            <a:schemeClr val="accent1"/>
+          </a:effectRef>
+          <a:fontRef idx="minor">
+            <a:schemeClr val="lt1"/>
+          </a:fontRef>
+        </p:style>
+        <p:txBody>
+          <a:bodyPr rtlCol="0" anchor="ctr"/>
+          <a:lstStyle/>
+          <a:p>
+            <a:pPr algn="ctr"/>
+          </a:p>
+        </p:txBody>
+      </p:sp>
+      <p:sp>
+        <p:nvSpPr>
+          <p:cNvPr id="20" name="Right Arrow 19"/>
+          <p:cNvSpPr/>
+          <p:nvPr/>
+        </p:nvSpPr>
+        <p:spPr>
+          <a:xfrm>
+            <a:off x="4882896" y="2980944"/>
+            <a:ext cx="201168" cy="146304"/>
+          </a:xfrm>
+          <a:prstGeom prst="rightArrow">
+            <a:avLst/>
+          </a:prstGeom>
+          <a:solidFill>
+            <a:srgbClr val="1F7A70"/>
+          </a:solidFill>
+          <a:ln>
+            <a:noFill/>
+          </a:ln>
+          <a:effectLst/>
+        </p:spPr>
+        <p:style>
+          <a:lnRef idx="1">
+            <a:schemeClr val="accent1"/>
+          </a:lnRef>
+          <a:fillRef idx="3">
+            <a:schemeClr val="accent1"/>
+          </a:fillRef>
+          <a:effectRef idx="2">
+            <a:schemeClr val="accent1"/>
+          </a:effectRef>
+          <a:fontRef idx="minor">
+            <a:schemeClr val="lt1"/>
+          </a:fontRef>
+        </p:style>
+        <p:txBody>
+          <a:bodyPr rtlCol="0" anchor="ctr"/>
+          <a:lstStyle/>
+          <a:p>
+            <a:pPr algn="ctr"/>
+          </a:p>
+        </p:txBody>
+      </p:sp>
+      <p:sp>
+        <p:nvSpPr>
+          <p:cNvPr id="21" name="Right Arrow 20"/>
+          <p:cNvSpPr/>
+          <p:nvPr/>
+        </p:nvSpPr>
+        <p:spPr>
+          <a:xfrm>
+            <a:off x="7095744" y="2980944"/>
+            <a:ext cx="201168" cy="146304"/>
+          </a:xfrm>
+          <a:prstGeom prst="rightArrow">
+            <a:avLst/>
+          </a:prstGeom>
+          <a:solidFill>
+            <a:srgbClr val="1F7A70"/>
+          </a:solidFill>
+          <a:ln>
+            <a:noFill/>
+          </a:ln>
+          <a:effectLst/>
+        </p:spPr>
+        <p:style>
+          <a:lnRef idx="1">
+            <a:schemeClr val="accent1"/>
+          </a:lnRef>
+          <a:fillRef idx="3">
+            <a:schemeClr val="accent1"/>
+          </a:fillRef>
+          <a:effectRef idx="2">
+            <a:schemeClr val="accent1"/>
+          </a:effectRef>
+          <a:fontRef idx="minor">
+            <a:schemeClr val="lt1"/>
+          </a:fontRef>
+        </p:style>
+        <p:txBody>
+          <a:bodyPr rtlCol="0" anchor="ctr"/>
+          <a:lstStyle/>
+          <a:p>
+            <a:pPr algn="ctr"/>
+          </a:p>
+        </p:txBody>
+      </p:sp>
+      <p:sp>
+        <p:nvSpPr>
+          <p:cNvPr id="22" name="Right Arrow 21"/>
+          <p:cNvSpPr/>
+          <p:nvPr/>
+        </p:nvSpPr>
+        <p:spPr>
+          <a:xfrm>
+            <a:off x="9308592" y="2980944"/>
+            <a:ext cx="201168" cy="146304"/>
+          </a:xfrm>
+          <a:prstGeom prst="rightArrow">
+            <a:avLst/>
+          </a:prstGeom>
+          <a:solidFill>
+            <a:srgbClr val="1F7A70"/>
+          </a:solidFill>
+          <a:ln>
+            <a:noFill/>
+          </a:ln>
+          <a:effectLst/>
+        </p:spPr>
+        <p:style>
+          <a:lnRef idx="1">
+            <a:schemeClr val="accent1"/>
+          </a:lnRef>
+          <a:fillRef idx="3">
+            <a:schemeClr val="accent1"/>
+          </a:fillRef>
+          <a:effectRef idx="2">
+            <a:schemeClr val="accent1"/>
+          </a:effectRef>
+          <a:fontRef idx="minor">
+            <a:schemeClr val="lt1"/>
+          </a:fontRef>
+        </p:style>
+        <p:txBody>
+          <a:bodyPr rtlCol="0" anchor="ctr"/>
+          <a:lstStyle/>
+          <a:p>
+            <a:pPr algn="ctr"/>
           </a:p>
         </p:txBody>
       </p:sp>
